--- a/decks/englit-gothic/englit-gothic_ch5_openings-voice-shifts.pptx
+++ b/decks/englit-gothic/englit-gothic_ch5_openings-voice-shifts.pptx
@@ -129,29 +129,29 @@
   <p:extLst>
     <p:ext uri="{521415D9-36F7-43E2-AB2F-B90AF26B5E84}">
       <p14:sectionLst xmlns:p14="http://schemas.microsoft.com/office/powerpoint/2010/main">
-        <p14:section name="Opening" id="{605043b5-9663-bb7c-be61-5d1c53eebbe0}">
+        <p14:section name="Opening" id="{5f07c8ab-523a-dd11-cd43-5b2e465d6eea}">
           <p14:sldIdLst>
             <p14:sldId id="256"/>
           </p14:sldIdLst>
         </p14:section>
-        <p14:section name="Gate" id="{3d029358-8949-8513-77e9-e6291fc3f6a1}">
+        <p14:section name="Gate" id="{8aef25ff-2cb5-7018-5681-6410707539b9}">
           <p14:sldIdLst>
             <p14:sldId id="257"/>
             <p14:sldId id="258"/>
           </p14:sldIdLst>
         </p14:section>
-        <p14:section name="Pre-teach" id="{ce05b4c7-265d-60cc-364a-03cf4518d4ad}">
+        <p14:section name="Pre-teach" id="{8230eaf3-d0d4-8348-5189-d06a1bda3e1b}">
           <p14:sldIdLst>
             <p14:sldId id="259"/>
           </p14:sldIdLst>
         </p14:section>
-        <p14:section name="Read-along" id="{46968a4c-727a-e69d-9fd9-c54cb19c3ec7}">
+        <p14:section name="Read-along" id="{3c8b9527-637b-f33b-ff46-d8ca6042dd13}">
           <p14:sldIdLst>
             <p14:sldId id="260"/>
             <p14:sldId id="261"/>
           </p14:sldIdLst>
         </p14:section>
-        <p14:section name="Teach" id="{c367411d-2bc1-3d82-8738-8cbebf44f499}">
+        <p14:section name="Teach" id="{14c0546e-0592-8dfa-f931-57de6adbc0a1}">
           <p14:sldIdLst>
             <p14:sldId id="262"/>
             <p14:sldId id="263"/>
@@ -161,7 +161,7 @@
             <p14:sldId id="267"/>
           </p14:sldIdLst>
         </p14:section>
-        <p14:section name="Routes" id="{a187b222-716a-4f0e-594b-8cc0f7a3e19f}">
+        <p14:section name="Routes" id="{cde256c1-18f5-4fc1-025b-1715d03ba247}">
           <p14:sldIdLst>
             <p14:sldId id="268"/>
             <p14:sldId id="269"/>
@@ -171,12 +171,12 @@
             <p14:sldId id="273"/>
           </p14:sldIdLst>
         </p14:section>
-        <p14:section name="Close" id="{8c67fa37-2fbf-bc57-faac-6d21c1dcba59}">
+        <p14:section name="Close" id="{28d2ae54-42ef-32cd-a8b5-353436d48316}">
           <p14:sldIdLst>
             <p14:sldId id="274"/>
           </p14:sldIdLst>
         </p14:section>
-        <p14:section name="Answers" id="{51311949-bc8d-72e6-67e6-931678ec3365}">
+        <p14:section name="Answers" id="{3af59200-ebb8-d060-9062-ad06c961a4b7}">
           <p14:sldIdLst>
             <p14:sldId id="275"/>
             <p14:sldId id="276"/>
@@ -1522,7 +1522,7 @@
               <a:rPr lang="en-US" dirty="0"/>
               <a:t>Exit ticket — individual, silent, on a slip or mini-whiteboard. Recall before help: no notes, no lanes, no hints. Collect before pupils leave.
 Question: What does ‘in medias res’ mean?
-Answer: A   Beginning in the middle of the action. The Latin phrase means into the middle of things. The story opens with the action already under way.
+Answer: B   Beginning in the middle of the action. The Latin phrase means into the middle of things. The story opens with the action already under way.
 Source of this question: gate item 1 re-asked (options rotated) — this chapter has no third quick-check module.
 The ebook also holds task 3, "Shape the opening", for homework or the next lesson's do now.
 Sort the slips: correct → ready to move on; incorrect → start next lesson in the pre-teach group, with the read-along and the Support lane. Same destination next time.</a:t>
@@ -1614,8 +1614,8 @@
             <a:r>
               <a:rPr lang="en-US" dirty="0"/>
               <a:t>Do now — retrieval. Silent, no notes, no help: recall comes before any support. Give about four minutes.
-1. What does ‘in medias res’ mean?  →  B   Beginning in the middle of the action
-2. Which narrator knows everything about the story and calls the characters ‘he’ or ‘she’?  →  C   Third-person omniscient narrator
+1. What does ‘in medias res’ mean?  →  C   Beginning in the middle of the action
+2. Which narrator knows everything about the story and calls the characters ‘he’ or ‘she’?  →  A   Third-person omniscient narrator
 3. A narrator who cannot be trusted to give a true version of events is called an ___ narrator.  →  unreliable
 Circulate: who gets 3/3 (Stretch route), 2/3 (Core), 0–1 (Support)? Use this to route pupils later in the lesson.</a:t>
             </a:r>
@@ -1983,7 +1983,7 @@
             <a:r>
               <a:rPr lang="en-US" dirty="0"/>
               <a:t>Answers — exit ticket: Exit ticket. Reveal the answer; pupils mark their own work in a different colour, then read the "why" together. Same destination for every lane, so one answer serves the whole class.
-Answer: A   Beginning in the middle of the action
+Answer: B   Beginning in the middle of the action
 Why: The Latin phrase means into the middle of things. The story opens with the action already under way.
 Ask a Support pupil to explain one step, and a Stretch pupil to share their extension.</a:t>
             </a:r>
@@ -2074,8 +2074,8 @@
             <a:r>
               <a:rPr lang="en-US" dirty="0"/>
               <a:t>Answers — pupils mark their own in a different colour, then hands up for 3/3, 2/3, 1/3.
-1. B   Beginning in the middle of the action. The Latin phrase means into the middle of things. The story opens with the action already under way.
-2. C   Third-person omniscient narrator. Omniscient means all-knowing. A third-person omniscient narrator can enter any character's mind and is often assumed to be the author.
+1. C   Beginning in the middle of the action. The Latin phrase means into the middle of things. The story opens with the action already under way.
+2. A   Third-person omniscient narrator. Omniscient means all-knowing. A third-person omniscient narrator can enter any character's mind and is often assumed to be the author.
 3. unreliable. An unreliable narrator may be lying, self-deceiving or simply mistaken. Readers must judge the story for themselves.
 Say the route each score points to: 3/3 Stretch, 2/3 Core, 0–1 Support. Pupils may choose to move up.</a:t>
             </a:r>
@@ -11519,7 +11519,7 @@
                 <a:ea typeface="Calibri" pitchFamily="34" charset="-122"/>
                 <a:cs typeface="Calibri" pitchFamily="34" charset="-120"/>
               </a:rPr>
-              <a:t>Beginning in the middle of the action</a:t>
+              <a:t>Beginning with a question to the reader</a:t>
             </a:r>
             <a:endParaRPr lang="en-US" sz="2400" dirty="0"/>
           </a:p>
@@ -11556,7 +11556,7 @@
                 <a:ea typeface="Calibri" pitchFamily="34" charset="-122"/>
                 <a:cs typeface="Calibri" pitchFamily="34" charset="-120"/>
               </a:rPr>
-              <a:t>Beginning by setting the scene slowly</a:t>
+              <a:t>Beginning in the middle of the action</a:t>
             </a:r>
             <a:endParaRPr lang="en-US" sz="2400" dirty="0"/>
           </a:p>
@@ -11593,7 +11593,7 @@
                 <a:ea typeface="Calibri" pitchFamily="34" charset="-122"/>
                 <a:cs typeface="Calibri" pitchFamily="34" charset="-120"/>
               </a:rPr>
-              <a:t>Beginning with a question to the reader</a:t>
+              <a:t>Beginning at the end and looking back</a:t>
             </a:r>
             <a:endParaRPr lang="en-US" sz="2400" dirty="0"/>
           </a:p>
@@ -11630,7 +11630,7 @@
                 <a:ea typeface="Calibri" pitchFamily="34" charset="-122"/>
                 <a:cs typeface="Calibri" pitchFamily="34" charset="-120"/>
               </a:rPr>
-              <a:t>Beginning at the end and looking back</a:t>
+              <a:t>Beginning by setting the scene slowly</a:t>
             </a:r>
             <a:endParaRPr lang="en-US" sz="2400" dirty="0"/>
           </a:p>
@@ -12110,7 +12110,7 @@
                 <a:ea typeface="Calibri" pitchFamily="34" charset="-122"/>
                 <a:cs typeface="Calibri" pitchFamily="34" charset="-120"/>
               </a:rPr>
-              <a:t>Beginning at the end and looking back</a:t>
+              <a:t>Beginning by setting the scene slowly</a:t>
             </a:r>
             <a:endParaRPr lang="en-US" sz="1800" dirty="0"/>
           </a:p>
@@ -12147,7 +12147,7 @@
                 <a:ea typeface="Calibri" pitchFamily="34" charset="-122"/>
                 <a:cs typeface="Calibri" pitchFamily="34" charset="-120"/>
               </a:rPr>
-              <a:t>Beginning in the middle of the action</a:t>
+              <a:t>Beginning with a question to the reader</a:t>
             </a:r>
             <a:endParaRPr lang="en-US" sz="1800" dirty="0"/>
           </a:p>
@@ -12184,7 +12184,7 @@
                 <a:ea typeface="Calibri" pitchFamily="34" charset="-122"/>
                 <a:cs typeface="Calibri" pitchFamily="34" charset="-120"/>
               </a:rPr>
-              <a:t>Beginning by setting the scene slowly</a:t>
+              <a:t>Beginning in the middle of the action</a:t>
             </a:r>
             <a:endParaRPr lang="en-US" sz="1800" dirty="0"/>
           </a:p>
@@ -12221,7 +12221,7 @@
                 <a:ea typeface="Calibri" pitchFamily="34" charset="-122"/>
                 <a:cs typeface="Calibri" pitchFamily="34" charset="-120"/>
               </a:rPr>
-              <a:t>Beginning with a question to the reader</a:t>
+              <a:t>Beginning at the end and looking back</a:t>
             </a:r>
             <a:endParaRPr lang="en-US" sz="1800" dirty="0"/>
           </a:p>
@@ -12425,7 +12425,7 @@
                 <a:ea typeface="Calibri" pitchFamily="34" charset="-122"/>
                 <a:cs typeface="Calibri" pitchFamily="34" charset="-120"/>
               </a:rPr>
-              <a:t>First-person narrator</a:t>
+              <a:t>Third-person omniscient narrator</a:t>
             </a:r>
             <a:endParaRPr lang="en-US" sz="2200" dirty="0"/>
           </a:p>
@@ -12462,7 +12462,7 @@
                 <a:ea typeface="Calibri" pitchFamily="34" charset="-122"/>
                 <a:cs typeface="Calibri" pitchFamily="34" charset="-120"/>
               </a:rPr>
-              <a:t>Unreliable narrator</a:t>
+              <a:t>First-person narrator</a:t>
             </a:r>
             <a:endParaRPr lang="en-US" sz="2200" dirty="0"/>
           </a:p>
@@ -12499,7 +12499,7 @@
                 <a:ea typeface="Calibri" pitchFamily="34" charset="-122"/>
                 <a:cs typeface="Calibri" pitchFamily="34" charset="-120"/>
               </a:rPr>
-              <a:t>Third-person omniscient narrator</a:t>
+              <a:t>Second-person address</a:t>
             </a:r>
             <a:endParaRPr lang="en-US" sz="2200" dirty="0"/>
           </a:p>
@@ -12536,7 +12536,7 @@
                 <a:ea typeface="Calibri" pitchFamily="34" charset="-122"/>
                 <a:cs typeface="Calibri" pitchFamily="34" charset="-120"/>
               </a:rPr>
-              <a:t>Second-person address</a:t>
+              <a:t>Unreliable narrator</a:t>
             </a:r>
             <a:endParaRPr lang="en-US" sz="2200" dirty="0"/>
           </a:p>
@@ -14678,7 +14678,7 @@
                 <a:ea typeface="Cambria" pitchFamily="34" charset="-122"/>
                 <a:cs typeface="Cambria" pitchFamily="34" charset="-120"/>
               </a:rPr>
-              <a:t>A   Beginning in the middle of the action</a:t>
+              <a:t>B   Beginning in the middle of the action</a:t>
             </a:r>
             <a:endParaRPr lang="en-US" sz="1800" dirty="0"/>
           </a:p>
@@ -15199,7 +15199,7 @@
                 <a:ea typeface="Calibri" pitchFamily="34" charset="-122"/>
                 <a:cs typeface="Calibri" pitchFamily="34" charset="-120"/>
               </a:rPr>
-              <a:t>B   Beginning in the middle of the action</a:t>
+              <a:t>C   Beginning in the middle of the action</a:t>
             </a:r>
             <a:endParaRPr lang="en-US" sz="2200" dirty="0"/>
           </a:p>
@@ -15449,7 +15449,7 @@
                 <a:ea typeface="Calibri" pitchFamily="34" charset="-122"/>
                 <a:cs typeface="Calibri" pitchFamily="34" charset="-120"/>
               </a:rPr>
-              <a:t>C   Third-person omniscient narrator</a:t>
+              <a:t>A   Third-person omniscient narrator</a:t>
             </a:r>
             <a:endParaRPr lang="en-US" sz="2200" dirty="0"/>
           </a:p>

--- a/decks/englit-gothic/englit-gothic_ch5_openings-voice-shifts.pptx
+++ b/decks/englit-gothic/englit-gothic_ch5_openings-voice-shifts.pptx
@@ -129,29 +129,29 @@
   <p:extLst>
     <p:ext uri="{521415D9-36F7-43E2-AB2F-B90AF26B5E84}">
       <p14:sectionLst xmlns:p14="http://schemas.microsoft.com/office/powerpoint/2010/main">
-        <p14:section name="Opening" id="{5f07c8ab-523a-dd11-cd43-5b2e465d6eea}">
+        <p14:section name="Opening" id="{20369a51-a773-1dc0-2a81-40830c0a5bcb}">
           <p14:sldIdLst>
             <p14:sldId id="256"/>
           </p14:sldIdLst>
         </p14:section>
-        <p14:section name="Gate" id="{8aef25ff-2cb5-7018-5681-6410707539b9}">
+        <p14:section name="Gate" id="{4163247c-f3d9-e841-492a-4dda502d5435}">
           <p14:sldIdLst>
             <p14:sldId id="257"/>
             <p14:sldId id="258"/>
           </p14:sldIdLst>
         </p14:section>
-        <p14:section name="Pre-teach" id="{8230eaf3-d0d4-8348-5189-d06a1bda3e1b}">
+        <p14:section name="Pre-teach" id="{6a662987-4940-3cfe-65cb-fd52f501c570}">
           <p14:sldIdLst>
             <p14:sldId id="259"/>
           </p14:sldIdLst>
         </p14:section>
-        <p14:section name="Read-along" id="{3c8b9527-637b-f33b-ff46-d8ca6042dd13}">
+        <p14:section name="Read-along" id="{5edd46ed-307f-b1d0-e57b-c7ad94d62015}">
           <p14:sldIdLst>
             <p14:sldId id="260"/>
             <p14:sldId id="261"/>
           </p14:sldIdLst>
         </p14:section>
-        <p14:section name="Teach" id="{14c0546e-0592-8dfa-f931-57de6adbc0a1}">
+        <p14:section name="Teach" id="{1d22089b-7c11-f2b0-998d-131fd7f84047}">
           <p14:sldIdLst>
             <p14:sldId id="262"/>
             <p14:sldId id="263"/>
@@ -161,7 +161,7 @@
             <p14:sldId id="267"/>
           </p14:sldIdLst>
         </p14:section>
-        <p14:section name="Routes" id="{cde256c1-18f5-4fc1-025b-1715d03ba247}">
+        <p14:section name="Routes" id="{fe88d88c-0e5b-4c01-4610-23ccfb98072b}">
           <p14:sldIdLst>
             <p14:sldId id="268"/>
             <p14:sldId id="269"/>
@@ -171,12 +171,12 @@
             <p14:sldId id="273"/>
           </p14:sldIdLst>
         </p14:section>
-        <p14:section name="Close" id="{28d2ae54-42ef-32cd-a8b5-353436d48316}">
+        <p14:section name="Close" id="{082252db-79f0-62dd-9f04-3e7f6d9d711a}">
           <p14:sldIdLst>
             <p14:sldId id="274"/>
           </p14:sldIdLst>
         </p14:section>
-        <p14:section name="Answers" id="{3af59200-ebb8-d060-9062-ad06c961a4b7}">
+        <p14:section name="Answers" id="{f4061b40-f301-7508-a111-692d9606dd1b}">
           <p14:sldIdLst>
             <p14:sldId id="275"/>
             <p14:sldId id="276"/>
